--- a/staticfiles/learn_page/infocards/infocard_template.pptx
+++ b/staticfiles/learn_page/infocards/infocard_template.pptx
@@ -161,10 +161,9 @@
           <a:lstStyle/>
           <a:p>
             <a:r>
-              <a:rPr lang="en-US" smtClean="0"/>
+              <a:rPr lang="en-US"/>
               <a:t>Click to edit Master title style</a:t>
             </a:r>
-            <a:endParaRPr lang="en-US"/>
           </a:p>
         </p:txBody>
       </p:sp>
@@ -280,10 +279,9 @@
           </a:lstStyle>
           <a:p>
             <a:r>
-              <a:rPr lang="en-US" smtClean="0"/>
+              <a:rPr lang="en-US"/>
               <a:t>Click to edit Master subtitle style</a:t>
             </a:r>
-            <a:endParaRPr lang="en-US"/>
           </a:p>
         </p:txBody>
       </p:sp>
@@ -304,7 +302,7 @@
           <a:p>
             <a:fld id="{5BCAD085-E8A6-8845-BD4E-CB4CCA059FC4}" type="datetimeFigureOut">
               <a:rPr lang="en-US" smtClean="0"/>
-              <a:t>12/19/2025</a:t>
+              <a:t>2/7/2026</a:t>
             </a:fld>
             <a:endParaRPr lang="en-US"/>
           </a:p>
@@ -398,10 +396,9 @@
           <a:lstStyle/>
           <a:p>
             <a:r>
-              <a:rPr lang="en-US" smtClean="0"/>
+              <a:rPr lang="en-US"/>
               <a:t>Click to edit Master title style</a:t>
             </a:r>
-            <a:endParaRPr lang="en-US"/>
           </a:p>
         </p:txBody>
       </p:sp>
@@ -422,38 +419,37 @@
           <a:p>
             <a:pPr lvl="0"/>
             <a:r>
-              <a:rPr lang="en-US" smtClean="0"/>
+              <a:rPr lang="en-US"/>
               <a:t>Click to edit Master text styles</a:t>
             </a:r>
           </a:p>
           <a:p>
             <a:pPr lvl="1"/>
             <a:r>
-              <a:rPr lang="en-US" smtClean="0"/>
+              <a:rPr lang="en-US"/>
               <a:t>Second level</a:t>
             </a:r>
           </a:p>
           <a:p>
             <a:pPr lvl="2"/>
             <a:r>
-              <a:rPr lang="en-US" smtClean="0"/>
+              <a:rPr lang="en-US"/>
               <a:t>Third level</a:t>
             </a:r>
           </a:p>
           <a:p>
             <a:pPr lvl="3"/>
             <a:r>
-              <a:rPr lang="en-US" smtClean="0"/>
+              <a:rPr lang="en-US"/>
               <a:t>Fourth level</a:t>
             </a:r>
           </a:p>
           <a:p>
             <a:pPr lvl="4"/>
             <a:r>
-              <a:rPr lang="en-US" smtClean="0"/>
+              <a:rPr lang="en-US"/>
               <a:t>Fifth level</a:t>
             </a:r>
-            <a:endParaRPr lang="en-US"/>
           </a:p>
         </p:txBody>
       </p:sp>
@@ -474,7 +470,7 @@
           <a:p>
             <a:fld id="{5BCAD085-E8A6-8845-BD4E-CB4CCA059FC4}" type="datetimeFigureOut">
               <a:rPr lang="en-US" smtClean="0"/>
-              <a:t>12/19/2025</a:t>
+              <a:t>2/7/2026</a:t>
             </a:fld>
             <a:endParaRPr lang="en-US"/>
           </a:p>
@@ -573,10 +569,9 @@
           <a:lstStyle/>
           <a:p>
             <a:r>
-              <a:rPr lang="en-US" smtClean="0"/>
+              <a:rPr lang="en-US"/>
               <a:t>Click to edit Master title style</a:t>
             </a:r>
-            <a:endParaRPr lang="en-US"/>
           </a:p>
         </p:txBody>
       </p:sp>
@@ -602,38 +597,37 @@
           <a:p>
             <a:pPr lvl="0"/>
             <a:r>
-              <a:rPr lang="en-US" smtClean="0"/>
+              <a:rPr lang="en-US"/>
               <a:t>Click to edit Master text styles</a:t>
             </a:r>
           </a:p>
           <a:p>
             <a:pPr lvl="1"/>
             <a:r>
-              <a:rPr lang="en-US" smtClean="0"/>
+              <a:rPr lang="en-US"/>
               <a:t>Second level</a:t>
             </a:r>
           </a:p>
           <a:p>
             <a:pPr lvl="2"/>
             <a:r>
-              <a:rPr lang="en-US" smtClean="0"/>
+              <a:rPr lang="en-US"/>
               <a:t>Third level</a:t>
             </a:r>
           </a:p>
           <a:p>
             <a:pPr lvl="3"/>
             <a:r>
-              <a:rPr lang="en-US" smtClean="0"/>
+              <a:rPr lang="en-US"/>
               <a:t>Fourth level</a:t>
             </a:r>
           </a:p>
           <a:p>
             <a:pPr lvl="4"/>
             <a:r>
-              <a:rPr lang="en-US" smtClean="0"/>
+              <a:rPr lang="en-US"/>
               <a:t>Fifth level</a:t>
             </a:r>
-            <a:endParaRPr lang="en-US"/>
           </a:p>
         </p:txBody>
       </p:sp>
@@ -654,7 +648,7 @@
           <a:p>
             <a:fld id="{5BCAD085-E8A6-8845-BD4E-CB4CCA059FC4}" type="datetimeFigureOut">
               <a:rPr lang="en-US" smtClean="0"/>
-              <a:t>12/19/2025</a:t>
+              <a:t>2/7/2026</a:t>
             </a:fld>
             <a:endParaRPr lang="en-US"/>
           </a:p>
@@ -748,10 +742,9 @@
           <a:lstStyle/>
           <a:p>
             <a:r>
-              <a:rPr lang="en-US" smtClean="0"/>
+              <a:rPr lang="en-US"/>
               <a:t>Click to edit Master title style</a:t>
             </a:r>
-            <a:endParaRPr lang="en-US"/>
           </a:p>
         </p:txBody>
       </p:sp>
@@ -772,38 +765,37 @@
           <a:p>
             <a:pPr lvl="0"/>
             <a:r>
-              <a:rPr lang="en-US" smtClean="0"/>
+              <a:rPr lang="en-US"/>
               <a:t>Click to edit Master text styles</a:t>
             </a:r>
           </a:p>
           <a:p>
             <a:pPr lvl="1"/>
             <a:r>
-              <a:rPr lang="en-US" smtClean="0"/>
+              <a:rPr lang="en-US"/>
               <a:t>Second level</a:t>
             </a:r>
           </a:p>
           <a:p>
             <a:pPr lvl="2"/>
             <a:r>
-              <a:rPr lang="en-US" smtClean="0"/>
+              <a:rPr lang="en-US"/>
               <a:t>Third level</a:t>
             </a:r>
           </a:p>
           <a:p>
             <a:pPr lvl="3"/>
             <a:r>
-              <a:rPr lang="en-US" smtClean="0"/>
+              <a:rPr lang="en-US"/>
               <a:t>Fourth level</a:t>
             </a:r>
           </a:p>
           <a:p>
             <a:pPr lvl="4"/>
             <a:r>
-              <a:rPr lang="en-US" smtClean="0"/>
+              <a:rPr lang="en-US"/>
               <a:t>Fifth level</a:t>
             </a:r>
-            <a:endParaRPr lang="en-US"/>
           </a:p>
         </p:txBody>
       </p:sp>
@@ -824,7 +816,7 @@
           <a:p>
             <a:fld id="{5BCAD085-E8A6-8845-BD4E-CB4CCA059FC4}" type="datetimeFigureOut">
               <a:rPr lang="en-US" smtClean="0"/>
-              <a:t>12/19/2025</a:t>
+              <a:t>2/7/2026</a:t>
             </a:fld>
             <a:endParaRPr lang="en-US"/>
           </a:p>
@@ -927,10 +919,9 @@
           </a:lstStyle>
           <a:p>
             <a:r>
-              <a:rPr lang="en-US" smtClean="0"/>
+              <a:rPr lang="en-US"/>
               <a:t>Click to edit Master title style</a:t>
             </a:r>
-            <a:endParaRPr lang="en-US"/>
           </a:p>
         </p:txBody>
       </p:sp>
@@ -1047,7 +1038,7 @@
           <a:p>
             <a:pPr lvl="0"/>
             <a:r>
-              <a:rPr lang="en-US" smtClean="0"/>
+              <a:rPr lang="en-US"/>
               <a:t>Click to edit Master text styles</a:t>
             </a:r>
           </a:p>
@@ -1070,7 +1061,7 @@
           <a:p>
             <a:fld id="{5BCAD085-E8A6-8845-BD4E-CB4CCA059FC4}" type="datetimeFigureOut">
               <a:rPr lang="en-US" smtClean="0"/>
-              <a:t>12/19/2025</a:t>
+              <a:t>2/7/2026</a:t>
             </a:fld>
             <a:endParaRPr lang="en-US"/>
           </a:p>
@@ -1164,10 +1155,9 @@
           <a:lstStyle/>
           <a:p>
             <a:r>
-              <a:rPr lang="en-US" smtClean="0"/>
+              <a:rPr lang="en-US"/>
               <a:t>Click to edit Master title style</a:t>
             </a:r>
-            <a:endParaRPr lang="en-US"/>
           </a:p>
         </p:txBody>
       </p:sp>
@@ -1221,38 +1211,37 @@
           <a:p>
             <a:pPr lvl="0"/>
             <a:r>
-              <a:rPr lang="en-US" smtClean="0"/>
+              <a:rPr lang="en-US"/>
               <a:t>Click to edit Master text styles</a:t>
             </a:r>
           </a:p>
           <a:p>
             <a:pPr lvl="1"/>
             <a:r>
-              <a:rPr lang="en-US" smtClean="0"/>
+              <a:rPr lang="en-US"/>
               <a:t>Second level</a:t>
             </a:r>
           </a:p>
           <a:p>
             <a:pPr lvl="2"/>
             <a:r>
-              <a:rPr lang="en-US" smtClean="0"/>
+              <a:rPr lang="en-US"/>
               <a:t>Third level</a:t>
             </a:r>
           </a:p>
           <a:p>
             <a:pPr lvl="3"/>
             <a:r>
-              <a:rPr lang="en-US" smtClean="0"/>
+              <a:rPr lang="en-US"/>
               <a:t>Fourth level</a:t>
             </a:r>
           </a:p>
           <a:p>
             <a:pPr lvl="4"/>
             <a:r>
-              <a:rPr lang="en-US" smtClean="0"/>
+              <a:rPr lang="en-US"/>
               <a:t>Fifth level</a:t>
             </a:r>
-            <a:endParaRPr lang="en-US"/>
           </a:p>
         </p:txBody>
       </p:sp>
@@ -1306,38 +1295,37 @@
           <a:p>
             <a:pPr lvl="0"/>
             <a:r>
-              <a:rPr lang="en-US" smtClean="0"/>
+              <a:rPr lang="en-US"/>
               <a:t>Click to edit Master text styles</a:t>
             </a:r>
           </a:p>
           <a:p>
             <a:pPr lvl="1"/>
             <a:r>
-              <a:rPr lang="en-US" smtClean="0"/>
+              <a:rPr lang="en-US"/>
               <a:t>Second level</a:t>
             </a:r>
           </a:p>
           <a:p>
             <a:pPr lvl="2"/>
             <a:r>
-              <a:rPr lang="en-US" smtClean="0"/>
+              <a:rPr lang="en-US"/>
               <a:t>Third level</a:t>
             </a:r>
           </a:p>
           <a:p>
             <a:pPr lvl="3"/>
             <a:r>
-              <a:rPr lang="en-US" smtClean="0"/>
+              <a:rPr lang="en-US"/>
               <a:t>Fourth level</a:t>
             </a:r>
           </a:p>
           <a:p>
             <a:pPr lvl="4"/>
             <a:r>
-              <a:rPr lang="en-US" smtClean="0"/>
+              <a:rPr lang="en-US"/>
               <a:t>Fifth level</a:t>
             </a:r>
-            <a:endParaRPr lang="en-US"/>
           </a:p>
         </p:txBody>
       </p:sp>
@@ -1358,7 +1346,7 @@
           <a:p>
             <a:fld id="{5BCAD085-E8A6-8845-BD4E-CB4CCA059FC4}" type="datetimeFigureOut">
               <a:rPr lang="en-US" smtClean="0"/>
-              <a:t>12/19/2025</a:t>
+              <a:t>2/7/2026</a:t>
             </a:fld>
             <a:endParaRPr lang="en-US"/>
           </a:p>
@@ -1456,10 +1444,9 @@
           </a:lstStyle>
           <a:p>
             <a:r>
-              <a:rPr lang="en-US" smtClean="0"/>
+              <a:rPr lang="en-US"/>
               <a:t>Click to edit Master title style</a:t>
             </a:r>
-            <a:endParaRPr lang="en-US"/>
           </a:p>
         </p:txBody>
       </p:sp>
@@ -1522,7 +1509,7 @@
           <a:p>
             <a:pPr lvl="0"/>
             <a:r>
-              <a:rPr lang="en-US" smtClean="0"/>
+              <a:rPr lang="en-US"/>
               <a:t>Click to edit Master text styles</a:t>
             </a:r>
           </a:p>
@@ -1578,38 +1565,37 @@
           <a:p>
             <a:pPr lvl="0"/>
             <a:r>
-              <a:rPr lang="en-US" smtClean="0"/>
+              <a:rPr lang="en-US"/>
               <a:t>Click to edit Master text styles</a:t>
             </a:r>
           </a:p>
           <a:p>
             <a:pPr lvl="1"/>
             <a:r>
-              <a:rPr lang="en-US" smtClean="0"/>
+              <a:rPr lang="en-US"/>
               <a:t>Second level</a:t>
             </a:r>
           </a:p>
           <a:p>
             <a:pPr lvl="2"/>
             <a:r>
-              <a:rPr lang="en-US" smtClean="0"/>
+              <a:rPr lang="en-US"/>
               <a:t>Third level</a:t>
             </a:r>
           </a:p>
           <a:p>
             <a:pPr lvl="3"/>
             <a:r>
-              <a:rPr lang="en-US" smtClean="0"/>
+              <a:rPr lang="en-US"/>
               <a:t>Fourth level</a:t>
             </a:r>
           </a:p>
           <a:p>
             <a:pPr lvl="4"/>
             <a:r>
-              <a:rPr lang="en-US" smtClean="0"/>
+              <a:rPr lang="en-US"/>
               <a:t>Fifth level</a:t>
             </a:r>
-            <a:endParaRPr lang="en-US"/>
           </a:p>
         </p:txBody>
       </p:sp>
@@ -1672,7 +1658,7 @@
           <a:p>
             <a:pPr lvl="0"/>
             <a:r>
-              <a:rPr lang="en-US" smtClean="0"/>
+              <a:rPr lang="en-US"/>
               <a:t>Click to edit Master text styles</a:t>
             </a:r>
           </a:p>
@@ -1728,38 +1714,37 @@
           <a:p>
             <a:pPr lvl="0"/>
             <a:r>
-              <a:rPr lang="en-US" smtClean="0"/>
+              <a:rPr lang="en-US"/>
               <a:t>Click to edit Master text styles</a:t>
             </a:r>
           </a:p>
           <a:p>
             <a:pPr lvl="1"/>
             <a:r>
-              <a:rPr lang="en-US" smtClean="0"/>
+              <a:rPr lang="en-US"/>
               <a:t>Second level</a:t>
             </a:r>
           </a:p>
           <a:p>
             <a:pPr lvl="2"/>
             <a:r>
-              <a:rPr lang="en-US" smtClean="0"/>
+              <a:rPr lang="en-US"/>
               <a:t>Third level</a:t>
             </a:r>
           </a:p>
           <a:p>
             <a:pPr lvl="3"/>
             <a:r>
-              <a:rPr lang="en-US" smtClean="0"/>
+              <a:rPr lang="en-US"/>
               <a:t>Fourth level</a:t>
             </a:r>
           </a:p>
           <a:p>
             <a:pPr lvl="4"/>
             <a:r>
-              <a:rPr lang="en-US" smtClean="0"/>
+              <a:rPr lang="en-US"/>
               <a:t>Fifth level</a:t>
             </a:r>
-            <a:endParaRPr lang="en-US"/>
           </a:p>
         </p:txBody>
       </p:sp>
@@ -1780,7 +1765,7 @@
           <a:p>
             <a:fld id="{5BCAD085-E8A6-8845-BD4E-CB4CCA059FC4}" type="datetimeFigureOut">
               <a:rPr lang="en-US" smtClean="0"/>
-              <a:t>12/19/2025</a:t>
+              <a:t>2/7/2026</a:t>
             </a:fld>
             <a:endParaRPr lang="en-US"/>
           </a:p>
@@ -1874,10 +1859,9 @@
           <a:lstStyle/>
           <a:p>
             <a:r>
-              <a:rPr lang="en-US" smtClean="0"/>
+              <a:rPr lang="en-US"/>
               <a:t>Click to edit Master title style</a:t>
             </a:r>
-            <a:endParaRPr lang="en-US"/>
           </a:p>
         </p:txBody>
       </p:sp>
@@ -1898,7 +1882,7 @@
           <a:p>
             <a:fld id="{5BCAD085-E8A6-8845-BD4E-CB4CCA059FC4}" type="datetimeFigureOut">
               <a:rPr lang="en-US" smtClean="0"/>
-              <a:t>12/19/2025</a:t>
+              <a:t>2/7/2026</a:t>
             </a:fld>
             <a:endParaRPr lang="en-US"/>
           </a:p>
@@ -1993,7 +1977,7 @@
           <a:p>
             <a:fld id="{5BCAD085-E8A6-8845-BD4E-CB4CCA059FC4}" type="datetimeFigureOut">
               <a:rPr lang="en-US" smtClean="0"/>
-              <a:t>12/19/2025</a:t>
+              <a:t>2/7/2026</a:t>
             </a:fld>
             <a:endParaRPr lang="en-US"/>
           </a:p>
@@ -2096,10 +2080,9 @@
           </a:lstStyle>
           <a:p>
             <a:r>
-              <a:rPr lang="en-US" smtClean="0"/>
+              <a:rPr lang="en-US"/>
               <a:t>Click to edit Master title style</a:t>
             </a:r>
-            <a:endParaRPr lang="en-US"/>
           </a:p>
         </p:txBody>
       </p:sp>
@@ -2153,38 +2136,37 @@
           <a:p>
             <a:pPr lvl="0"/>
             <a:r>
-              <a:rPr lang="en-US" smtClean="0"/>
+              <a:rPr lang="en-US"/>
               <a:t>Click to edit Master text styles</a:t>
             </a:r>
           </a:p>
           <a:p>
             <a:pPr lvl="1"/>
             <a:r>
-              <a:rPr lang="en-US" smtClean="0"/>
+              <a:rPr lang="en-US"/>
               <a:t>Second level</a:t>
             </a:r>
           </a:p>
           <a:p>
             <a:pPr lvl="2"/>
             <a:r>
-              <a:rPr lang="en-US" smtClean="0"/>
+              <a:rPr lang="en-US"/>
               <a:t>Third level</a:t>
             </a:r>
           </a:p>
           <a:p>
             <a:pPr lvl="3"/>
             <a:r>
-              <a:rPr lang="en-US" smtClean="0"/>
+              <a:rPr lang="en-US"/>
               <a:t>Fourth level</a:t>
             </a:r>
           </a:p>
           <a:p>
             <a:pPr lvl="4"/>
             <a:r>
-              <a:rPr lang="en-US" smtClean="0"/>
+              <a:rPr lang="en-US"/>
               <a:t>Fifth level</a:t>
             </a:r>
-            <a:endParaRPr lang="en-US"/>
           </a:p>
         </p:txBody>
       </p:sp>
@@ -2247,7 +2229,7 @@
           <a:p>
             <a:pPr lvl="0"/>
             <a:r>
-              <a:rPr lang="en-US" smtClean="0"/>
+              <a:rPr lang="en-US"/>
               <a:t>Click to edit Master text styles</a:t>
             </a:r>
           </a:p>
@@ -2270,7 +2252,7 @@
           <a:p>
             <a:fld id="{5BCAD085-E8A6-8845-BD4E-CB4CCA059FC4}" type="datetimeFigureOut">
               <a:rPr lang="en-US" smtClean="0"/>
-              <a:t>12/19/2025</a:t>
+              <a:t>2/7/2026</a:t>
             </a:fld>
             <a:endParaRPr lang="en-US"/>
           </a:p>
@@ -2373,10 +2355,9 @@
           </a:lstStyle>
           <a:p>
             <a:r>
-              <a:rPr lang="en-US" smtClean="0"/>
+              <a:rPr lang="en-US"/>
               <a:t>Click to edit Master title style</a:t>
             </a:r>
-            <a:endParaRPr lang="en-US"/>
           </a:p>
         </p:txBody>
       </p:sp>
@@ -2500,7 +2481,7 @@
           <a:p>
             <a:pPr lvl="0"/>
             <a:r>
-              <a:rPr lang="en-US" smtClean="0"/>
+              <a:rPr lang="en-US"/>
               <a:t>Click to edit Master text styles</a:t>
             </a:r>
           </a:p>
@@ -2523,7 +2504,7 @@
           <a:p>
             <a:fld id="{5BCAD085-E8A6-8845-BD4E-CB4CCA059FC4}" type="datetimeFigureOut">
               <a:rPr lang="en-US" smtClean="0"/>
-              <a:t>12/19/2025</a:t>
+              <a:t>2/7/2026</a:t>
             </a:fld>
             <a:endParaRPr lang="en-US"/>
           </a:p>
@@ -2632,10 +2613,9 @@
           <a:lstStyle/>
           <a:p>
             <a:r>
-              <a:rPr lang="en-US" smtClean="0"/>
+              <a:rPr lang="en-US"/>
               <a:t>Click to edit Master title style</a:t>
             </a:r>
-            <a:endParaRPr lang="en-US"/>
           </a:p>
         </p:txBody>
       </p:sp>
@@ -2666,38 +2646,37 @@
           <a:p>
             <a:pPr lvl="0"/>
             <a:r>
-              <a:rPr lang="en-US" smtClean="0"/>
+              <a:rPr lang="en-US"/>
               <a:t>Click to edit Master text styles</a:t>
             </a:r>
           </a:p>
           <a:p>
             <a:pPr lvl="1"/>
             <a:r>
-              <a:rPr lang="en-US" smtClean="0"/>
+              <a:rPr lang="en-US"/>
               <a:t>Second level</a:t>
             </a:r>
           </a:p>
           <a:p>
             <a:pPr lvl="2"/>
             <a:r>
-              <a:rPr lang="en-US" smtClean="0"/>
+              <a:rPr lang="en-US"/>
               <a:t>Third level</a:t>
             </a:r>
           </a:p>
           <a:p>
             <a:pPr lvl="3"/>
             <a:r>
-              <a:rPr lang="en-US" smtClean="0"/>
+              <a:rPr lang="en-US"/>
               <a:t>Fourth level</a:t>
             </a:r>
           </a:p>
           <a:p>
             <a:pPr lvl="4"/>
             <a:r>
-              <a:rPr lang="en-US" smtClean="0"/>
+              <a:rPr lang="en-US"/>
               <a:t>Fifth level</a:t>
             </a:r>
-            <a:endParaRPr lang="en-US"/>
           </a:p>
         </p:txBody>
       </p:sp>
@@ -2736,7 +2715,7 @@
           <a:p>
             <a:fld id="{5BCAD085-E8A6-8845-BD4E-CB4CCA059FC4}" type="datetimeFigureOut">
               <a:rPr lang="en-US" smtClean="0"/>
-              <a:t>12/19/2025</a:t>
+              <a:t>2/7/2026</a:t>
             </a:fld>
             <a:endParaRPr lang="en-US"/>
           </a:p>
@@ -3154,8 +3133,8 @@
         </p:nvSpPr>
         <p:spPr>
           <a:xfrm>
-            <a:off x="1778000" y="432649"/>
-            <a:ext cx="5798820" cy="1052596"/>
+            <a:off x="1237154" y="451398"/>
+            <a:ext cx="6696387" cy="1052596"/>
           </a:xfrm>
           <a:prstGeom prst="rect">
             <a:avLst/>
@@ -3168,6 +3147,7 @@
           </a:bodyPr>
           <a:lstStyle/>
           <a:p>
+            <a:pPr algn="ctr"/>
             <a:r>
               <a:rPr lang="en-US" sz="6240" dirty="0">
                 <a:solidFill>
@@ -3175,7 +3155,7 @@
                 </a:solidFill>
                 <a:latin typeface="Bahnschrift SemiBold" panose="020B0502040204020203" pitchFamily="34" charset="0"/>
               </a:rPr>
-              <a:t>CROCODILIANS</a:t>
+              <a:t>MYSTICETES</a:t>
             </a:r>
           </a:p>
         </p:txBody>
@@ -3209,7 +3189,7 @@
                 </a:solidFill>
                 <a:latin typeface="Bahnschrift SemiBold" panose="020B0502040204020203" pitchFamily="34" charset="0"/>
               </a:rPr>
-              <a:t>What are crocodilians?</a:t>
+              <a:t>What are they?</a:t>
             </a:r>
           </a:p>
         </p:txBody>
@@ -3222,8 +3202,8 @@
         </p:nvSpPr>
         <p:spPr>
           <a:xfrm>
-            <a:off x="1031241" y="2120051"/>
-            <a:ext cx="3398519" cy="1772793"/>
+            <a:off x="1044588" y="2122743"/>
+            <a:ext cx="3398519" cy="1052596"/>
           </a:xfrm>
           <a:prstGeom prst="rect">
             <a:avLst/>
@@ -3237,67 +3217,18 @@
           <a:lstStyle/>
           <a:p>
             <a:r>
+              <a:rPr lang="en-US" sz="1560" dirty="0" err="1">
+                <a:latin typeface="Arial" panose="020B0604020202020204" pitchFamily="34" charset="0"/>
+                <a:cs typeface="Arial" panose="020B0604020202020204" pitchFamily="34" charset="0"/>
+              </a:rPr>
+              <a:t>Fishfinders</a:t>
+            </a:r>
+            <a:r>
               <a:rPr lang="en-US" sz="1560" dirty="0">
                 <a:latin typeface="Arial" panose="020B0604020202020204" pitchFamily="34" charset="0"/>
                 <a:cs typeface="Arial" panose="020B0604020202020204" pitchFamily="34" charset="0"/>
               </a:rPr>
-              <a:t>Crocodilians refers to an order of reptiles that includes all members of the Family </a:t>
-            </a:r>
-            <a:r>
-              <a:rPr lang="en-US" sz="1560" i="1" dirty="0" err="1">
-                <a:latin typeface="Arial" panose="020B0604020202020204" pitchFamily="34" charset="0"/>
-                <a:cs typeface="Arial" panose="020B0604020202020204" pitchFamily="34" charset="0"/>
-              </a:rPr>
-              <a:t>Crocodylidae</a:t>
-            </a:r>
-            <a:r>
-              <a:rPr lang="en-US" sz="1560" dirty="0">
-                <a:latin typeface="Arial" panose="020B0604020202020204" pitchFamily="34" charset="0"/>
-                <a:cs typeface="Arial" panose="020B0604020202020204" pitchFamily="34" charset="0"/>
-              </a:rPr>
-              <a:t> (“true” crocodiles), Family </a:t>
-            </a:r>
-            <a:r>
-              <a:rPr lang="en-US" sz="1560" i="1" dirty="0" err="1">
-                <a:latin typeface="Arial" panose="020B0604020202020204" pitchFamily="34" charset="0"/>
-                <a:cs typeface="Arial" panose="020B0604020202020204" pitchFamily="34" charset="0"/>
-              </a:rPr>
-              <a:t>Alligatoridae</a:t>
-            </a:r>
-            <a:r>
-              <a:rPr lang="en-US" sz="1560" dirty="0">
-                <a:latin typeface="Arial" panose="020B0604020202020204" pitchFamily="34" charset="0"/>
-                <a:cs typeface="Arial" panose="020B0604020202020204" pitchFamily="34" charset="0"/>
-              </a:rPr>
-              <a:t> (alligators and caimans) and Family </a:t>
-            </a:r>
-            <a:r>
-              <a:rPr lang="en-US" sz="1560" i="1" dirty="0">
-                <a:latin typeface="Arial" panose="020B0604020202020204" pitchFamily="34" charset="0"/>
-                <a:cs typeface="Arial" panose="020B0604020202020204" pitchFamily="34" charset="0"/>
-              </a:rPr>
-              <a:t>Gavialidae </a:t>
-            </a:r>
-            <a:r>
-              <a:rPr lang="en-US" sz="1560" dirty="0">
-                <a:latin typeface="Arial" panose="020B0604020202020204" pitchFamily="34" charset="0"/>
-                <a:cs typeface="Arial" panose="020B0604020202020204" pitchFamily="34" charset="0"/>
-              </a:rPr>
-              <a:t>(gharials and </a:t>
-            </a:r>
-            <a:r>
-              <a:rPr lang="en-US" sz="1560" dirty="0" err="1">
-                <a:latin typeface="Arial" panose="020B0604020202020204" pitchFamily="34" charset="0"/>
-                <a:cs typeface="Arial" panose="020B0604020202020204" pitchFamily="34" charset="0"/>
-              </a:rPr>
-              <a:t>tomistomas</a:t>
-            </a:r>
-            <a:r>
-              <a:rPr lang="en-US" sz="1560" dirty="0">
-                <a:latin typeface="Arial" panose="020B0604020202020204" pitchFamily="34" charset="0"/>
-                <a:cs typeface="Arial" panose="020B0604020202020204" pitchFamily="34" charset="0"/>
-              </a:rPr>
-              <a:t>).</a:t>
+              <a:t> and echosounders are active acoustic tools used to locate fish, measure depth, and map seafloor features.</a:t>
             </a:r>
             <a:endParaRPr lang="en-US" sz="1560" i="1" dirty="0">
               <a:latin typeface="Sans Serif Collection" panose="020B0502040504020204" pitchFamily="34" charset="0"/>
@@ -3349,8 +3280,8 @@
         </p:nvSpPr>
         <p:spPr>
           <a:xfrm>
-            <a:off x="1031241" y="4186814"/>
-            <a:ext cx="3398519" cy="1772793"/>
+            <a:off x="1050618" y="4186814"/>
+            <a:ext cx="3398519" cy="1052596"/>
           </a:xfrm>
           <a:prstGeom prst="rect">
             <a:avLst/>
@@ -3368,7 +3299,7 @@
                 <a:latin typeface="Arial" panose="020B0604020202020204" pitchFamily="34" charset="0"/>
                 <a:cs typeface="Arial" panose="020B0604020202020204" pitchFamily="34" charset="0"/>
               </a:rPr>
-              <a:t>These species use bellows, hisses, and underwater calls to communicate, defend territory, and attract mates. Mother crocodilians can even detect their babies’ contact calls before the eggs hatch, allowing them to prepare for the hatchlings. </a:t>
+              <a:t>They emit short, high-frequency sound pulses and record echoes reflected from fish and other underwater objects.</a:t>
             </a:r>
             <a:endParaRPr lang="en-US" sz="1560" i="1" dirty="0">
               <a:latin typeface="Sans Serif Collection" panose="020B0502040504020204" pitchFamily="34" charset="0"/>
@@ -3421,8 +3352,8 @@
         </p:nvSpPr>
         <p:spPr>
           <a:xfrm>
-            <a:off x="4757422" y="4199746"/>
-            <a:ext cx="3398519" cy="1292662"/>
+            <a:off x="4623746" y="4233965"/>
+            <a:ext cx="4281492" cy="1772793"/>
           </a:xfrm>
           <a:prstGeom prst="rect">
             <a:avLst/>
@@ -3440,7 +3371,7 @@
                 <a:latin typeface="Arial" panose="020B0604020202020204" pitchFamily="34" charset="0"/>
                 <a:cs typeface="Arial" panose="020B0604020202020204" pitchFamily="34" charset="0"/>
               </a:rPr>
-              <a:t>Scientists are learning more about how these animals produce and perceive sound, and how human-made noise can impact their behavior and communication.</a:t>
+              <a:t>Baleen whales play a major role in marine ecosystems. By consuming large quantities of prey and redistributing nutrients through their waste, they enhance ocean productivity. When they die, their bodies sink to the seafloor, transporting and storing carbon for decades or longer, helping regulate Earth’s climate.</a:t>
             </a:r>
           </a:p>
         </p:txBody>
@@ -3489,13 +3420,8 @@
           <p:nvPr/>
         </p:nvPicPr>
         <p:blipFill>
-          <a:blip r:embed="rId2" cstate="print">
-            <a:extLst>
-              <a:ext uri="{28A0092B-C50C-407E-A947-70E740481C1C}">
-                <a14:useLocalDpi xmlns:a14="http://schemas.microsoft.com/office/drawing/2010/main" val="0"/>
-              </a:ext>
-            </a:extLst>
-          </a:blip>
+          <a:blip r:embed="rId2"/>
+          <a:srcRect b="29796"/>
           <a:stretch>
             <a:fillRect/>
           </a:stretch>
@@ -3567,6 +3493,7 @@
         <p:nvCxnSpPr>
           <p:cNvPr id="17" name="Straight Connector 16"/>
           <p:cNvCxnSpPr>
+            <a:cxnSpLocks/>
             <a:endCxn id="19" idx="3"/>
           </p:cNvCxnSpPr>
           <p:nvPr/>
@@ -3642,8 +3569,8 @@
         </p:nvSpPr>
         <p:spPr>
           <a:xfrm>
-            <a:off x="1557195" y="6425455"/>
-            <a:ext cx="1554479" cy="305789"/>
+            <a:off x="1332230" y="6502372"/>
+            <a:ext cx="1995283" cy="305789"/>
           </a:xfrm>
           <a:prstGeom prst="rect">
             <a:avLst/>
@@ -3661,7 +3588,7 @@
                 <a:latin typeface="Arial" panose="020B0604020202020204" pitchFamily="34" charset="0"/>
                 <a:cs typeface="Arial" panose="020B0604020202020204" pitchFamily="34" charset="0"/>
               </a:rPr>
-              <a:t>(a) Pre-hatching</a:t>
+              <a:t>(a) Blue Whale</a:t>
             </a:r>
             <a:endParaRPr lang="en-US" sz="1387" i="1" dirty="0">
               <a:latin typeface="Sans Serif Collection" panose="020B0502040504020204" pitchFamily="34" charset="0"/>
@@ -3671,331 +3598,6 @@
           </a:p>
         </p:txBody>
       </p:sp>
-      <p:sp>
-        <p:nvSpPr>
-          <p:cNvPr id="21" name="TextBox 20"/>
-          <p:cNvSpPr txBox="1"/>
-          <p:nvPr/>
-        </p:nvSpPr>
-        <p:spPr>
-          <a:xfrm>
-            <a:off x="3500296" y="6425455"/>
-            <a:ext cx="1554479" cy="305789"/>
-          </a:xfrm>
-          <a:prstGeom prst="rect">
-            <a:avLst/>
-          </a:prstGeom>
-          <a:noFill/>
-        </p:spPr>
-        <p:txBody>
-          <a:bodyPr wrap="square" rtlCol="0">
-            <a:spAutoFit/>
-          </a:bodyPr>
-          <a:lstStyle/>
-          <a:p>
-            <a:r>
-              <a:rPr lang="en-US" sz="1387" dirty="0">
-                <a:latin typeface="Arial" panose="020B0604020202020204" pitchFamily="34" charset="0"/>
-                <a:cs typeface="Arial" panose="020B0604020202020204" pitchFamily="34" charset="0"/>
-              </a:rPr>
-              <a:t>(b) Contact</a:t>
-            </a:r>
-            <a:endParaRPr lang="en-US" sz="1387" i="1" dirty="0">
-              <a:latin typeface="Sans Serif Collection" panose="020B0502040504020204" pitchFamily="34" charset="0"/>
-              <a:ea typeface="Sans Serif Collection" panose="020B0502040504020204" pitchFamily="34" charset="0"/>
-              <a:cs typeface="Sans Serif Collection" panose="020B0502040504020204" pitchFamily="34" charset="0"/>
-            </a:endParaRPr>
-          </a:p>
-        </p:txBody>
-      </p:sp>
-      <p:sp>
-        <p:nvSpPr>
-          <p:cNvPr id="22" name="TextBox 21"/>
-          <p:cNvSpPr txBox="1"/>
-          <p:nvPr/>
-        </p:nvSpPr>
-        <p:spPr>
-          <a:xfrm>
-            <a:off x="5186855" y="6425455"/>
-            <a:ext cx="1554479" cy="305789"/>
-          </a:xfrm>
-          <a:prstGeom prst="rect">
-            <a:avLst/>
-          </a:prstGeom>
-          <a:noFill/>
-        </p:spPr>
-        <p:txBody>
-          <a:bodyPr wrap="square" rtlCol="0">
-            <a:spAutoFit/>
-          </a:bodyPr>
-          <a:lstStyle/>
-          <a:p>
-            <a:r>
-              <a:rPr lang="en-US" sz="1387" dirty="0">
-                <a:latin typeface="Arial" panose="020B0604020202020204" pitchFamily="34" charset="0"/>
-                <a:cs typeface="Arial" panose="020B0604020202020204" pitchFamily="34" charset="0"/>
-              </a:rPr>
-              <a:t>(c) Distress</a:t>
-            </a:r>
-            <a:endParaRPr lang="en-US" sz="1387" i="1" dirty="0">
-              <a:latin typeface="Sans Serif Collection" panose="020B0502040504020204" pitchFamily="34" charset="0"/>
-              <a:ea typeface="Sans Serif Collection" panose="020B0502040504020204" pitchFamily="34" charset="0"/>
-              <a:cs typeface="Sans Serif Collection" panose="020B0502040504020204" pitchFamily="34" charset="0"/>
-            </a:endParaRPr>
-          </a:p>
-        </p:txBody>
-      </p:sp>
-      <p:sp>
-        <p:nvSpPr>
-          <p:cNvPr id="23" name="TextBox 22"/>
-          <p:cNvSpPr txBox="1"/>
-          <p:nvPr/>
-        </p:nvSpPr>
-        <p:spPr>
-          <a:xfrm>
-            <a:off x="6873415" y="6423584"/>
-            <a:ext cx="1554479" cy="305789"/>
-          </a:xfrm>
-          <a:prstGeom prst="rect">
-            <a:avLst/>
-          </a:prstGeom>
-          <a:noFill/>
-        </p:spPr>
-        <p:txBody>
-          <a:bodyPr wrap="square" rtlCol="0">
-            <a:spAutoFit/>
-          </a:bodyPr>
-          <a:lstStyle/>
-          <a:p>
-            <a:r>
-              <a:rPr lang="en-US" sz="1387" dirty="0">
-                <a:latin typeface="Arial" panose="020B0604020202020204" pitchFamily="34" charset="0"/>
-                <a:cs typeface="Arial" panose="020B0604020202020204" pitchFamily="34" charset="0"/>
-              </a:rPr>
-              <a:t>(d) Hissing</a:t>
-            </a:r>
-            <a:endParaRPr lang="en-US" sz="1387" i="1" dirty="0">
-              <a:latin typeface="Sans Serif Collection" panose="020B0502040504020204" pitchFamily="34" charset="0"/>
-              <a:ea typeface="Sans Serif Collection" panose="020B0502040504020204" pitchFamily="34" charset="0"/>
-              <a:cs typeface="Sans Serif Collection" panose="020B0502040504020204" pitchFamily="34" charset="0"/>
-            </a:endParaRPr>
-          </a:p>
-        </p:txBody>
-      </p:sp>
-      <p:sp>
-        <p:nvSpPr>
-          <p:cNvPr id="24" name="TextBox 23"/>
-          <p:cNvSpPr txBox="1"/>
-          <p:nvPr/>
-        </p:nvSpPr>
-        <p:spPr>
-          <a:xfrm>
-            <a:off x="4178474" y="8249373"/>
-            <a:ext cx="1554479" cy="305789"/>
-          </a:xfrm>
-          <a:prstGeom prst="rect">
-            <a:avLst/>
-          </a:prstGeom>
-          <a:noFill/>
-        </p:spPr>
-        <p:txBody>
-          <a:bodyPr wrap="square" rtlCol="0">
-            <a:spAutoFit/>
-          </a:bodyPr>
-          <a:lstStyle/>
-          <a:p>
-            <a:r>
-              <a:rPr lang="en-US" sz="1387" dirty="0">
-                <a:latin typeface="Arial" panose="020B0604020202020204" pitchFamily="34" charset="0"/>
-                <a:cs typeface="Arial" panose="020B0604020202020204" pitchFamily="34" charset="0"/>
-              </a:rPr>
-              <a:t>(f) Bellow</a:t>
-            </a:r>
-            <a:endParaRPr lang="en-US" sz="1387" i="1" dirty="0">
-              <a:latin typeface="Sans Serif Collection" panose="020B0502040504020204" pitchFamily="34" charset="0"/>
-              <a:ea typeface="Sans Serif Collection" panose="020B0502040504020204" pitchFamily="34" charset="0"/>
-              <a:cs typeface="Sans Serif Collection" panose="020B0502040504020204" pitchFamily="34" charset="0"/>
-            </a:endParaRPr>
-          </a:p>
-        </p:txBody>
-      </p:sp>
-      <p:pic>
-        <p:nvPicPr>
-          <p:cNvPr id="25" name="Picture 24"/>
-          <p:cNvPicPr>
-            <a:picLocks noChangeAspect="1"/>
-          </p:cNvPicPr>
-          <p:nvPr/>
-        </p:nvPicPr>
-        <p:blipFill>
-          <a:blip r:embed="rId3"/>
-          <a:stretch>
-            <a:fillRect/>
-          </a:stretch>
-        </p:blipFill>
-        <p:spPr>
-          <a:xfrm>
-            <a:off x="1724837" y="8509324"/>
-            <a:ext cx="1767839" cy="1340970"/>
-          </a:xfrm>
-          <a:prstGeom prst="rect">
-            <a:avLst/>
-          </a:prstGeom>
-        </p:spPr>
-      </p:pic>
-      <p:sp>
-        <p:nvSpPr>
-          <p:cNvPr id="26" name="TextBox 25"/>
-          <p:cNvSpPr txBox="1"/>
-          <p:nvPr/>
-        </p:nvSpPr>
-        <p:spPr>
-          <a:xfrm>
-            <a:off x="1861993" y="8248431"/>
-            <a:ext cx="1643032" cy="305789"/>
-          </a:xfrm>
-          <a:prstGeom prst="rect">
-            <a:avLst/>
-          </a:prstGeom>
-          <a:noFill/>
-        </p:spPr>
-        <p:txBody>
-          <a:bodyPr wrap="square" rtlCol="0">
-            <a:spAutoFit/>
-          </a:bodyPr>
-          <a:lstStyle/>
-          <a:p>
-            <a:r>
-              <a:rPr lang="en-US" sz="1387" dirty="0">
-                <a:latin typeface="Arial" panose="020B0604020202020204" pitchFamily="34" charset="0"/>
-                <a:cs typeface="Arial" panose="020B0604020202020204" pitchFamily="34" charset="0"/>
-              </a:rPr>
-              <a:t>(e) Cough/Rumble</a:t>
-            </a:r>
-            <a:endParaRPr lang="en-US" sz="1387" i="1" dirty="0">
-              <a:latin typeface="Sans Serif Collection" panose="020B0502040504020204" pitchFamily="34" charset="0"/>
-              <a:ea typeface="Sans Serif Collection" panose="020B0502040504020204" pitchFamily="34" charset="0"/>
-              <a:cs typeface="Sans Serif Collection" panose="020B0502040504020204" pitchFamily="34" charset="0"/>
-            </a:endParaRPr>
-          </a:p>
-        </p:txBody>
-      </p:sp>
-      <p:pic>
-        <p:nvPicPr>
-          <p:cNvPr id="27" name="Picture 26">
-            <a:extLst>
-              <a:ext uri="{FF2B5EF4-FFF2-40B4-BE49-F238E27FC236}">
-                <a16:creationId xmlns:a16="http://schemas.microsoft.com/office/drawing/2014/main" xmlns="" id="{6C1E4E83-660E-F3A2-96E4-B85B671A1376}"/>
-              </a:ext>
-            </a:extLst>
-          </p:cNvPr>
-          <p:cNvPicPr>
-            <a:picLocks noChangeAspect="1"/>
-          </p:cNvPicPr>
-          <p:nvPr/>
-        </p:nvPicPr>
-        <p:blipFill rotWithShape="1">
-          <a:blip r:embed="rId4"/>
-          <a:srcRect t="11765"/>
-          <a:stretch/>
-        </p:blipFill>
-        <p:spPr>
-          <a:xfrm>
-            <a:off x="1237156" y="6696306"/>
-            <a:ext cx="1875792" cy="1488881"/>
-          </a:xfrm>
-          <a:prstGeom prst="rect">
-            <a:avLst/>
-          </a:prstGeom>
-        </p:spPr>
-      </p:pic>
-      <p:pic>
-        <p:nvPicPr>
-          <p:cNvPr id="28" name="Picture 27">
-            <a:extLst>
-              <a:ext uri="{FF2B5EF4-FFF2-40B4-BE49-F238E27FC236}">
-                <a16:creationId xmlns:a16="http://schemas.microsoft.com/office/drawing/2014/main" xmlns="" id="{E612CF93-4C76-465A-99EA-07537EADD0CD}"/>
-              </a:ext>
-            </a:extLst>
-          </p:cNvPr>
-          <p:cNvPicPr>
-            <a:picLocks noChangeAspect="1"/>
-          </p:cNvPicPr>
-          <p:nvPr/>
-        </p:nvPicPr>
-        <p:blipFill rotWithShape="1">
-          <a:blip r:embed="rId5"/>
-          <a:srcRect t="9369"/>
-          <a:stretch/>
-        </p:blipFill>
-        <p:spPr>
-          <a:xfrm>
-            <a:off x="3073747" y="6660284"/>
-            <a:ext cx="1881968" cy="1522899"/>
-          </a:xfrm>
-          <a:prstGeom prst="rect">
-            <a:avLst/>
-          </a:prstGeom>
-        </p:spPr>
-      </p:pic>
-      <p:pic>
-        <p:nvPicPr>
-          <p:cNvPr id="29" name="Picture 28">
-            <a:extLst>
-              <a:ext uri="{FF2B5EF4-FFF2-40B4-BE49-F238E27FC236}">
-                <a16:creationId xmlns:a16="http://schemas.microsoft.com/office/drawing/2014/main" xmlns="" id="{76234D2F-1D98-2A80-6CF1-AE7FB218CA57}"/>
-              </a:ext>
-            </a:extLst>
-          </p:cNvPr>
-          <p:cNvPicPr>
-            <a:picLocks noChangeAspect="1"/>
-          </p:cNvPicPr>
-          <p:nvPr/>
-        </p:nvPicPr>
-        <p:blipFill rotWithShape="1">
-          <a:blip r:embed="rId6"/>
-          <a:srcRect t="12148"/>
-          <a:stretch/>
-        </p:blipFill>
-        <p:spPr>
-          <a:xfrm>
-            <a:off x="5095414" y="6697743"/>
-            <a:ext cx="1351455" cy="1450887"/>
-          </a:xfrm>
-          <a:prstGeom prst="rect">
-            <a:avLst/>
-          </a:prstGeom>
-        </p:spPr>
-      </p:pic>
-      <p:pic>
-        <p:nvPicPr>
-          <p:cNvPr id="30" name="Picture 29">
-            <a:extLst>
-              <a:ext uri="{FF2B5EF4-FFF2-40B4-BE49-F238E27FC236}">
-                <a16:creationId xmlns:a16="http://schemas.microsoft.com/office/drawing/2014/main" xmlns="" id="{A6261976-725B-7A51-DF64-DD18C9897BBC}"/>
-              </a:ext>
-            </a:extLst>
-          </p:cNvPr>
-          <p:cNvPicPr>
-            <a:picLocks noChangeAspect="1"/>
-          </p:cNvPicPr>
-          <p:nvPr/>
-        </p:nvPicPr>
-        <p:blipFill rotWithShape="1">
-          <a:blip r:embed="rId7"/>
-          <a:srcRect t="9134"/>
-          <a:stretch/>
-        </p:blipFill>
-        <p:spPr>
-          <a:xfrm>
-            <a:off x="6645041" y="6696306"/>
-            <a:ext cx="1652042" cy="1381423"/>
-          </a:xfrm>
-          <a:prstGeom prst="rect">
-            <a:avLst/>
-          </a:prstGeom>
-        </p:spPr>
-      </p:pic>
       <p:cxnSp>
         <p:nvCxnSpPr>
           <p:cNvPr id="32" name="Straight Connector 31"/>
@@ -4033,35 +3635,6 @@
           </a:fontRef>
         </p:style>
       </p:cxnSp>
-      <p:pic>
-        <p:nvPicPr>
-          <p:cNvPr id="33" name="Picture 32">
-            <a:extLst>
-              <a:ext uri="{FF2B5EF4-FFF2-40B4-BE49-F238E27FC236}">
-                <a16:creationId xmlns:a16="http://schemas.microsoft.com/office/drawing/2014/main" xmlns="" id="{3173F7E5-5346-E9AD-881A-5D40E4DAEF2B}"/>
-              </a:ext>
-            </a:extLst>
-          </p:cNvPr>
-          <p:cNvPicPr>
-            <a:picLocks noChangeAspect="1"/>
-          </p:cNvPicPr>
-          <p:nvPr/>
-        </p:nvPicPr>
-        <p:blipFill rotWithShape="1">
-          <a:blip r:embed="rId8"/>
-          <a:srcRect t="33405"/>
-          <a:stretch/>
-        </p:blipFill>
-        <p:spPr>
-          <a:xfrm>
-            <a:off x="3629834" y="8509323"/>
-            <a:ext cx="4594861" cy="1234629"/>
-          </a:xfrm>
-          <a:prstGeom prst="rect">
-            <a:avLst/>
-          </a:prstGeom>
-        </p:spPr>
-      </p:pic>
       <p:cxnSp>
         <p:nvCxnSpPr>
           <p:cNvPr id="34" name="Straight Connector 33"/>
@@ -4070,7 +3643,7 @@
         </p:nvCxnSpPr>
         <p:spPr>
           <a:xfrm>
-            <a:off x="1336215" y="9734588"/>
+            <a:off x="1332230" y="8698268"/>
             <a:ext cx="6705600" cy="0"/>
           </a:xfrm>
           <a:prstGeom prst="line">
@@ -4142,7 +3715,7 @@
         </p:nvSpPr>
         <p:spPr>
           <a:xfrm>
-            <a:off x="1527985" y="9848405"/>
+            <a:off x="1272217" y="9942682"/>
             <a:ext cx="6703057" cy="492635"/>
           </a:xfrm>
           <a:prstGeom prst="rect">
@@ -4161,61 +3734,360 @@
                 <a:latin typeface="Arial" panose="020B0604020202020204" pitchFamily="34" charset="0"/>
                 <a:cs typeface="Arial" panose="020B0604020202020204" pitchFamily="34" charset="0"/>
               </a:rPr>
-              <a:t>Acoustic signals used by crocodilians: (a) pre-hatching calls of embryos </a:t>
-            </a:r>
-            <a:r>
-              <a:rPr lang="en-US" sz="867" dirty="0"/>
-              <a:t>(</a:t>
-            </a:r>
-            <a:r>
-              <a:rPr lang="en-US" sz="867" dirty="0" err="1"/>
-              <a:t>Vergne</a:t>
-            </a:r>
-            <a:r>
-              <a:rPr lang="en-US" sz="867" dirty="0"/>
-              <a:t> et al. 2009, Biol. Rev.), (b) juvenile contact calls (</a:t>
-            </a:r>
-            <a:r>
-              <a:rPr lang="en-US" sz="867" dirty="0" err="1"/>
-              <a:t>Vergne</a:t>
-            </a:r>
-            <a:r>
-              <a:rPr lang="en-US" sz="867" dirty="0"/>
-              <a:t> et al. 2009, Biol. Rev.), (c) juvenile distress calls (</a:t>
-            </a:r>
-            <a:r>
-              <a:rPr lang="en-US" sz="867" dirty="0" err="1"/>
-              <a:t>Vergne</a:t>
-            </a:r>
-            <a:r>
-              <a:rPr lang="en-US" sz="867" dirty="0"/>
-              <a:t> et al. 2009, Biol. Rev.), (d )juvenile/adult hissing call (</a:t>
-            </a:r>
-            <a:r>
-              <a:rPr lang="en-US" sz="867" dirty="0" err="1"/>
-              <a:t>Vergne</a:t>
-            </a:r>
-            <a:r>
-              <a:rPr lang="en-US" sz="867" dirty="0"/>
-              <a:t> et al. 2009, Biol. Rev.), (e) adult rumble (</a:t>
-            </a:r>
-            <a:r>
-              <a:rPr lang="en-US" sz="867" dirty="0" err="1"/>
-              <a:t>Staniewicz</a:t>
-            </a:r>
-            <a:r>
-              <a:rPr lang="en-US" sz="867" dirty="0"/>
-              <a:t> et al. 2022, Bioacoustics), (f)  adult bellow (Jensen et al. 2022, Anim. </a:t>
-            </a:r>
-            <a:r>
-              <a:rPr lang="en-US" sz="867" dirty="0" err="1"/>
-              <a:t>Behav</a:t>
-            </a:r>
-            <a:r>
-              <a:rPr lang="en-US" sz="867" dirty="0"/>
-              <a:t>)</a:t>
+              <a:t>Acoustic signals made by various mysticetes. All spectrograms and sounds courtesy of NOAA. (NOAA [National Oceanic and Atmospheric Administration]. Passive Acoustics Group. 2021. Dele_NOAA_04. https://www.fisheries.noaa.gov/national/science-data/sounds-ocean)</a:t>
             </a:r>
             <a:endParaRPr lang="en-US" sz="867" i="1" dirty="0">
+              <a:latin typeface="Sans Serif Collection" panose="020B0502040504020204" pitchFamily="34" charset="0"/>
+              <a:ea typeface="Sans Serif Collection" panose="020B0502040504020204" pitchFamily="34" charset="0"/>
+              <a:cs typeface="Sans Serif Collection" panose="020B0502040504020204" pitchFamily="34" charset="0"/>
+            </a:endParaRPr>
+          </a:p>
+        </p:txBody>
+      </p:sp>
+      <p:pic>
+        <p:nvPicPr>
+          <p:cNvPr id="41" name="Picture 40">
+            <a:extLst>
+              <a:ext uri="{FF2B5EF4-FFF2-40B4-BE49-F238E27FC236}">
+                <a16:creationId xmlns:a16="http://schemas.microsoft.com/office/drawing/2014/main" id="{195BF12B-E225-4A0A-2B07-25A86A76A74D}"/>
+              </a:ext>
+            </a:extLst>
+          </p:cNvPr>
+          <p:cNvPicPr>
+            <a:picLocks noChangeAspect="1"/>
+          </p:cNvPicPr>
+          <p:nvPr/>
+        </p:nvPicPr>
+        <p:blipFill>
+          <a:blip r:embed="rId3"/>
+          <a:stretch>
+            <a:fillRect/>
+          </a:stretch>
+        </p:blipFill>
+        <p:spPr>
+          <a:xfrm>
+            <a:off x="1437817" y="6768447"/>
+            <a:ext cx="1472369" cy="1483695"/>
+          </a:xfrm>
+          <a:prstGeom prst="rect">
+            <a:avLst/>
+          </a:prstGeom>
+        </p:spPr>
+      </p:pic>
+      <p:pic>
+        <p:nvPicPr>
+          <p:cNvPr id="48" name="Picture 47">
+            <a:extLst>
+              <a:ext uri="{FF2B5EF4-FFF2-40B4-BE49-F238E27FC236}">
+                <a16:creationId xmlns:a16="http://schemas.microsoft.com/office/drawing/2014/main" id="{337A6400-25FB-E94D-9565-F3A5B6DFD6F4}"/>
+              </a:ext>
+            </a:extLst>
+          </p:cNvPr>
+          <p:cNvPicPr>
+            <a:picLocks noChangeAspect="1"/>
+          </p:cNvPicPr>
+          <p:nvPr/>
+        </p:nvPicPr>
+        <p:blipFill>
+          <a:blip r:embed="rId3"/>
+          <a:stretch>
+            <a:fillRect/>
+          </a:stretch>
+        </p:blipFill>
+        <p:spPr>
+          <a:xfrm>
+            <a:off x="1422603" y="6755240"/>
+            <a:ext cx="1472369" cy="1483695"/>
+          </a:xfrm>
+          <a:prstGeom prst="rect">
+            <a:avLst/>
+          </a:prstGeom>
+        </p:spPr>
+      </p:pic>
+      <p:pic>
+        <p:nvPicPr>
+          <p:cNvPr id="49" name="Picture 48">
+            <a:extLst>
+              <a:ext uri="{FF2B5EF4-FFF2-40B4-BE49-F238E27FC236}">
+                <a16:creationId xmlns:a16="http://schemas.microsoft.com/office/drawing/2014/main" id="{B4745507-0328-643D-35C2-D7D5E882F3B4}"/>
+              </a:ext>
+            </a:extLst>
+          </p:cNvPr>
+          <p:cNvPicPr>
+            <a:picLocks noChangeAspect="1"/>
+          </p:cNvPicPr>
+          <p:nvPr/>
+        </p:nvPicPr>
+        <p:blipFill>
+          <a:blip r:embed="rId4"/>
+          <a:srcRect/>
+          <a:stretch/>
+        </p:blipFill>
+        <p:spPr>
+          <a:xfrm>
+            <a:off x="2894972" y="6759768"/>
+            <a:ext cx="2232815" cy="1501051"/>
+          </a:xfrm>
+          <a:prstGeom prst="rect">
+            <a:avLst/>
+          </a:prstGeom>
+        </p:spPr>
+      </p:pic>
+      <p:sp>
+        <p:nvSpPr>
+          <p:cNvPr id="53" name="TextBox 52">
+            <a:extLst>
+              <a:ext uri="{FF2B5EF4-FFF2-40B4-BE49-F238E27FC236}">
+                <a16:creationId xmlns:a16="http://schemas.microsoft.com/office/drawing/2014/main" id="{CE62C05F-B58B-7ADA-5ADF-CB8F9A8DD4EE}"/>
+              </a:ext>
+            </a:extLst>
+          </p:cNvPr>
+          <p:cNvSpPr txBox="1"/>
+          <p:nvPr/>
+        </p:nvSpPr>
+        <p:spPr>
+          <a:xfrm>
+            <a:off x="5398723" y="6518541"/>
+            <a:ext cx="1995283" cy="305789"/>
+          </a:xfrm>
+          <a:prstGeom prst="rect">
+            <a:avLst/>
+          </a:prstGeom>
+          <a:noFill/>
+        </p:spPr>
+        <p:txBody>
+          <a:bodyPr wrap="square" rtlCol="0">
+            <a:spAutoFit/>
+          </a:bodyPr>
+          <a:lstStyle/>
+          <a:p>
+            <a:r>
+              <a:rPr lang="en-US" sz="1387" dirty="0">
+                <a:latin typeface="Arial" panose="020B0604020202020204" pitchFamily="34" charset="0"/>
+                <a:cs typeface="Arial" panose="020B0604020202020204" pitchFamily="34" charset="0"/>
+              </a:rPr>
+              <a:t>(c) Humpback Whale</a:t>
+            </a:r>
+            <a:endParaRPr lang="en-US" sz="1387" i="1" dirty="0">
+              <a:latin typeface="Sans Serif Collection" panose="020B0502040504020204" pitchFamily="34" charset="0"/>
+              <a:ea typeface="Sans Serif Collection" panose="020B0502040504020204" pitchFamily="34" charset="0"/>
+              <a:cs typeface="Sans Serif Collection" panose="020B0502040504020204" pitchFamily="34" charset="0"/>
+            </a:endParaRPr>
+          </a:p>
+        </p:txBody>
+      </p:sp>
+      <p:pic>
+        <p:nvPicPr>
+          <p:cNvPr id="55" name="Picture 54">
+            <a:extLst>
+              <a:ext uri="{FF2B5EF4-FFF2-40B4-BE49-F238E27FC236}">
+                <a16:creationId xmlns:a16="http://schemas.microsoft.com/office/drawing/2014/main" id="{438084D7-A558-1850-AF7D-E508EA4F543C}"/>
+              </a:ext>
+            </a:extLst>
+          </p:cNvPr>
+          <p:cNvPicPr>
+            <a:picLocks noChangeAspect="1"/>
+          </p:cNvPicPr>
+          <p:nvPr/>
+        </p:nvPicPr>
+        <p:blipFill>
+          <a:blip r:embed="rId5"/>
+          <a:stretch>
+            <a:fillRect/>
+          </a:stretch>
+        </p:blipFill>
+        <p:spPr>
+          <a:xfrm>
+            <a:off x="5279958" y="6768447"/>
+            <a:ext cx="2232815" cy="1489335"/>
+          </a:xfrm>
+          <a:prstGeom prst="rect">
+            <a:avLst/>
+          </a:prstGeom>
+        </p:spPr>
+      </p:pic>
+      <p:sp>
+        <p:nvSpPr>
+          <p:cNvPr id="56" name="TextBox 55">
+            <a:extLst>
+              <a:ext uri="{FF2B5EF4-FFF2-40B4-BE49-F238E27FC236}">
+                <a16:creationId xmlns:a16="http://schemas.microsoft.com/office/drawing/2014/main" id="{6823FB09-EE8F-4229-04B2-06EA832C404F}"/>
+              </a:ext>
+            </a:extLst>
+          </p:cNvPr>
+          <p:cNvSpPr txBox="1"/>
+          <p:nvPr/>
+        </p:nvSpPr>
+        <p:spPr>
+          <a:xfrm>
+            <a:off x="3450365" y="6530054"/>
+            <a:ext cx="1995283" cy="305789"/>
+          </a:xfrm>
+          <a:prstGeom prst="rect">
+            <a:avLst/>
+          </a:prstGeom>
+          <a:noFill/>
+        </p:spPr>
+        <p:txBody>
+          <a:bodyPr wrap="square" rtlCol="0">
+            <a:spAutoFit/>
+          </a:bodyPr>
+          <a:lstStyle/>
+          <a:p>
+            <a:r>
+              <a:rPr lang="en-US" sz="1387" dirty="0">
+                <a:latin typeface="Arial" panose="020B0604020202020204" pitchFamily="34" charset="0"/>
+                <a:cs typeface="Arial" panose="020B0604020202020204" pitchFamily="34" charset="0"/>
+              </a:rPr>
+              <a:t>(b) Fin Whale</a:t>
+            </a:r>
+            <a:endParaRPr lang="en-US" sz="1387" i="1" dirty="0">
+              <a:latin typeface="Sans Serif Collection" panose="020B0502040504020204" pitchFamily="34" charset="0"/>
+              <a:ea typeface="Sans Serif Collection" panose="020B0502040504020204" pitchFamily="34" charset="0"/>
+              <a:cs typeface="Sans Serif Collection" panose="020B0502040504020204" pitchFamily="34" charset="0"/>
+            </a:endParaRPr>
+          </a:p>
+        </p:txBody>
+      </p:sp>
+      <p:pic>
+        <p:nvPicPr>
+          <p:cNvPr id="58" name="Picture 57">
+            <a:extLst>
+              <a:ext uri="{FF2B5EF4-FFF2-40B4-BE49-F238E27FC236}">
+                <a16:creationId xmlns:a16="http://schemas.microsoft.com/office/drawing/2014/main" id="{E130D546-745D-8FB5-7B92-C189C2BDBFC0}"/>
+              </a:ext>
+            </a:extLst>
+          </p:cNvPr>
+          <p:cNvPicPr>
+            <a:picLocks noChangeAspect="1"/>
+          </p:cNvPicPr>
+          <p:nvPr/>
+        </p:nvPicPr>
+        <p:blipFill>
+          <a:blip r:embed="rId6"/>
+          <a:stretch>
+            <a:fillRect/>
+          </a:stretch>
+        </p:blipFill>
+        <p:spPr>
+          <a:xfrm>
+            <a:off x="2044955" y="8613997"/>
+            <a:ext cx="1881885" cy="1288135"/>
+          </a:xfrm>
+          <a:prstGeom prst="rect">
+            <a:avLst/>
+          </a:prstGeom>
+        </p:spPr>
+      </p:pic>
+      <p:sp>
+        <p:nvSpPr>
+          <p:cNvPr id="59" name="TextBox 58">
+            <a:extLst>
+              <a:ext uri="{FF2B5EF4-FFF2-40B4-BE49-F238E27FC236}">
+                <a16:creationId xmlns:a16="http://schemas.microsoft.com/office/drawing/2014/main" id="{00BEAF7E-6EA0-90C9-D177-5D97105994B0}"/>
+              </a:ext>
+            </a:extLst>
+          </p:cNvPr>
+          <p:cNvSpPr txBox="1"/>
+          <p:nvPr/>
+        </p:nvSpPr>
+        <p:spPr>
+          <a:xfrm>
+            <a:off x="4769209" y="8354660"/>
+            <a:ext cx="1995283" cy="305789"/>
+          </a:xfrm>
+          <a:prstGeom prst="rect">
+            <a:avLst/>
+          </a:prstGeom>
+          <a:noFill/>
+        </p:spPr>
+        <p:txBody>
+          <a:bodyPr wrap="square" rtlCol="0">
+            <a:spAutoFit/>
+          </a:bodyPr>
+          <a:lstStyle/>
+          <a:p>
+            <a:r>
+              <a:rPr lang="en-US" sz="1387" dirty="0">
+                <a:latin typeface="Arial" panose="020B0604020202020204" pitchFamily="34" charset="0"/>
+                <a:cs typeface="Arial" panose="020B0604020202020204" pitchFamily="34" charset="0"/>
+              </a:rPr>
+              <a:t>(e) Sei Whale</a:t>
+            </a:r>
+            <a:endParaRPr lang="en-US" sz="1387" i="1" dirty="0">
+              <a:latin typeface="Sans Serif Collection" panose="020B0502040504020204" pitchFamily="34" charset="0"/>
+              <a:ea typeface="Sans Serif Collection" panose="020B0502040504020204" pitchFamily="34" charset="0"/>
+              <a:cs typeface="Sans Serif Collection" panose="020B0502040504020204" pitchFamily="34" charset="0"/>
+            </a:endParaRPr>
+          </a:p>
+        </p:txBody>
+      </p:sp>
+      <p:pic>
+        <p:nvPicPr>
+          <p:cNvPr id="61" name="Picture 60">
+            <a:extLst>
+              <a:ext uri="{FF2B5EF4-FFF2-40B4-BE49-F238E27FC236}">
+                <a16:creationId xmlns:a16="http://schemas.microsoft.com/office/drawing/2014/main" id="{E41A8305-2542-4EB9-62C3-61F9E954BE1D}"/>
+              </a:ext>
+            </a:extLst>
+          </p:cNvPr>
+          <p:cNvPicPr>
+            <a:picLocks noChangeAspect="1"/>
+          </p:cNvPicPr>
+          <p:nvPr/>
+        </p:nvPicPr>
+        <p:blipFill>
+          <a:blip r:embed="rId7"/>
+          <a:stretch>
+            <a:fillRect/>
+          </a:stretch>
+        </p:blipFill>
+        <p:spPr>
+          <a:xfrm>
+            <a:off x="4536441" y="8613997"/>
+            <a:ext cx="1881886" cy="1268009"/>
+          </a:xfrm>
+          <a:prstGeom prst="rect">
+            <a:avLst/>
+          </a:prstGeom>
+        </p:spPr>
+      </p:pic>
+      <p:sp>
+        <p:nvSpPr>
+          <p:cNvPr id="62" name="TextBox 61">
+            <a:extLst>
+              <a:ext uri="{FF2B5EF4-FFF2-40B4-BE49-F238E27FC236}">
+                <a16:creationId xmlns:a16="http://schemas.microsoft.com/office/drawing/2014/main" id="{D11E652A-A856-B837-8A1C-A1AE70563CB1}"/>
+              </a:ext>
+            </a:extLst>
+          </p:cNvPr>
+          <p:cNvSpPr txBox="1"/>
+          <p:nvPr/>
+        </p:nvSpPr>
+        <p:spPr>
+          <a:xfrm>
+            <a:off x="2273991" y="8372204"/>
+            <a:ext cx="1995283" cy="305789"/>
+          </a:xfrm>
+          <a:prstGeom prst="rect">
+            <a:avLst/>
+          </a:prstGeom>
+          <a:noFill/>
+        </p:spPr>
+        <p:txBody>
+          <a:bodyPr wrap="square" rtlCol="0">
+            <a:spAutoFit/>
+          </a:bodyPr>
+          <a:lstStyle/>
+          <a:p>
+            <a:r>
+              <a:rPr lang="en-US" sz="1387" dirty="0">
+                <a:latin typeface="Arial" panose="020B0604020202020204" pitchFamily="34" charset="0"/>
+                <a:cs typeface="Arial" panose="020B0604020202020204" pitchFamily="34" charset="0"/>
+              </a:rPr>
+              <a:t>(d) Right Whale</a:t>
+            </a:r>
+            <a:endParaRPr lang="en-US" sz="1387" i="1" dirty="0">
               <a:latin typeface="Sans Serif Collection" panose="020B0502040504020204" pitchFamily="34" charset="0"/>
               <a:ea typeface="Sans Serif Collection" panose="020B0502040504020204" pitchFamily="34" charset="0"/>
               <a:cs typeface="Sans Serif Collection" panose="020B0502040504020204" pitchFamily="34" charset="0"/>
